--- a/in_class_slides/geog4300_L09-Visualizing and describing spatial data.pptx
+++ b/in_class_slides/geog4300_L09-Visualizing and describing spatial data.pptx
@@ -5197,47 +5197,74 @@
           </a:p>
         </p:txBody>
       </p:sp>
-      <p:pic>
-        <p:nvPicPr>
-          <p:cNvPr id="2050" name="Picture 2" descr="Dot Density Map - Chart Types - FlowingData">
+      <p:sp>
+        <p:nvSpPr>
+          <p:cNvPr id="6" name="TextBox 5">
             <a:extLst>
               <a:ext uri="{FF2B5EF4-FFF2-40B4-BE49-F238E27FC236}">
-                <a16:creationId xmlns:a16="http://schemas.microsoft.com/office/drawing/2014/main" id="{C0F06541-9DB6-4ACA-9922-F48938A0FCE5}"/>
+                <a16:creationId xmlns:a16="http://schemas.microsoft.com/office/drawing/2014/main" id="{B94199FC-D7AE-4083-9B96-72809C26467B}"/>
               </a:ext>
             </a:extLst>
           </p:cNvPr>
-          <p:cNvPicPr>
-            <a:picLocks noChangeAspect="1" noChangeArrowheads="1"/>
-          </p:cNvPicPr>
+          <p:cNvSpPr txBox="1"/>
           <p:nvPr/>
-        </p:nvPicPr>
-        <p:blipFill>
-          <a:blip r:embed="rId2">
-            <a:extLst>
-              <a:ext uri="{28A0092B-C50C-407E-A947-70E740481C1C}">
-                <a14:useLocalDpi xmlns:a14="http://schemas.microsoft.com/office/drawing/2010/main" val="0"/>
-              </a:ext>
-            </a:extLst>
-          </a:blip>
-          <a:srcRect/>
-          <a:stretch>
-            <a:fillRect/>
-          </a:stretch>
-        </p:blipFill>
-        <p:spPr bwMode="auto">
+        </p:nvSpPr>
+        <p:spPr>
           <a:xfrm>
-            <a:off x="1097280" y="1925690"/>
-            <a:ext cx="6847303" cy="4030020"/>
+            <a:off x="8576284" y="5798264"/>
+            <a:ext cx="1766730" cy="369332"/>
           </a:xfrm>
           <a:prstGeom prst="rect">
             <a:avLst/>
           </a:prstGeom>
           <a:noFill/>
+        </p:spPr>
+        <p:txBody>
+          <a:bodyPr wrap="square">
+            <a:spAutoFit/>
+          </a:bodyPr>
+          <a:lstStyle/>
+          <a:p>
+            <a:r>
+              <a:rPr lang="en-US" sz="1800" dirty="0"/>
+              <a:t>Flowing Data</a:t>
+            </a:r>
+            <a:endParaRPr lang="en-US" dirty="0"/>
+          </a:p>
+        </p:txBody>
+      </p:sp>
+      <p:pic>
+        <p:nvPicPr>
+          <p:cNvPr id="5" name="Picture 4">
+            <a:extLst>
+              <a:ext uri="{FF2B5EF4-FFF2-40B4-BE49-F238E27FC236}">
+                <a16:creationId xmlns:a16="http://schemas.microsoft.com/office/drawing/2014/main" id="{8091DD40-F472-4FCE-9A85-68BEC20A76A7}"/>
+              </a:ext>
+            </a:extLst>
+          </p:cNvPr>
+          <p:cNvPicPr>
+            <a:picLocks noChangeAspect="1"/>
+          </p:cNvPicPr>
+          <p:nvPr/>
+        </p:nvPicPr>
+        <p:blipFill>
+          <a:blip r:embed="rId2"/>
+          <a:stretch>
+            <a:fillRect/>
+          </a:stretch>
+        </p:blipFill>
+        <p:spPr>
+          <a:xfrm>
+            <a:off x="1097279" y="2105659"/>
+            <a:ext cx="6999023" cy="4180084"/>
+          </a:xfrm>
+          <a:prstGeom prst="rect">
+            <a:avLst/>
+          </a:prstGeom>
           <a:ln>
             <a:solidFill>
-              <a:schemeClr val="tx1">
-                <a:lumMod val="40000"/>
-                <a:lumOff val="60000"/>
+              <a:schemeClr val="bg1">
+                <a:lumMod val="75000"/>
               </a:schemeClr>
             </a:solidFill>
           </a:ln>
@@ -5248,53 +5275,8 @@
               </a:prstClr>
             </a:outerShdw>
           </a:effectLst>
-          <a:extLst>
-            <a:ext uri="{909E8E84-426E-40DD-AFC4-6F175D3DCCD1}">
-              <a14:hiddenFill xmlns:a14="http://schemas.microsoft.com/office/drawing/2010/main">
-                <a:solidFill>
-                  <a:srgbClr val="FFFFFF"/>
-                </a:solidFill>
-              </a14:hiddenFill>
-            </a:ext>
-          </a:extLst>
         </p:spPr>
       </p:pic>
-      <p:sp>
-        <p:nvSpPr>
-          <p:cNvPr id="6" name="TextBox 5">
-            <a:extLst>
-              <a:ext uri="{FF2B5EF4-FFF2-40B4-BE49-F238E27FC236}">
-                <a16:creationId xmlns:a16="http://schemas.microsoft.com/office/drawing/2014/main" id="{B94199FC-D7AE-4083-9B96-72809C26467B}"/>
-              </a:ext>
-            </a:extLst>
-          </p:cNvPr>
-          <p:cNvSpPr txBox="1"/>
-          <p:nvPr/>
-        </p:nvSpPr>
-        <p:spPr>
-          <a:xfrm>
-            <a:off x="6553704" y="5955710"/>
-            <a:ext cx="1766730" cy="369332"/>
-          </a:xfrm>
-          <a:prstGeom prst="rect">
-            <a:avLst/>
-          </a:prstGeom>
-          <a:noFill/>
-        </p:spPr>
-        <p:txBody>
-          <a:bodyPr wrap="square">
-            <a:spAutoFit/>
-          </a:bodyPr>
-          <a:lstStyle/>
-          <a:p>
-            <a:r>
-              <a:rPr lang="en-US" sz="1800" dirty="0"/>
-              <a:t>Flowing Data</a:t>
-            </a:r>
-            <a:endParaRPr lang="en-US" dirty="0"/>
-          </a:p>
-        </p:txBody>
-      </p:sp>
     </p:spTree>
     <p:extLst>
       <p:ext uri="{BB962C8B-B14F-4D97-AF65-F5344CB8AC3E}">
@@ -5430,24 +5412,18 @@
           <a:lstStyle/>
           <a:p>
             <a:r>
-              <a:rPr lang="en-US" sz="1200" dirty="0">
-                <a:hlinkClick r:id="rId2"/>
-              </a:rPr>
-              <a:t>https://www.youtube.com/watch?v=8KXaKM3N3ko</a:t>
-            </a:r>
-            <a:r>
               <a:rPr lang="en-US" sz="1200" dirty="0"/>
-              <a:t> </a:t>
+              <a:t>University of Toronto Libraries</a:t>
             </a:r>
           </a:p>
         </p:txBody>
       </p:sp>
       <p:pic>
         <p:nvPicPr>
-          <p:cNvPr id="4098" name="Picture 2" descr="Kernel density map using John Snow's Cholera Data in ArcGIS - YouTube">
+          <p:cNvPr id="3074" name="Picture 2">
             <a:extLst>
               <a:ext uri="{FF2B5EF4-FFF2-40B4-BE49-F238E27FC236}">
-                <a16:creationId xmlns:a16="http://schemas.microsoft.com/office/drawing/2014/main" id="{C9CC818F-F0DF-40F6-B5F5-5FD2B633DA2D}"/>
+                <a16:creationId xmlns:a16="http://schemas.microsoft.com/office/drawing/2014/main" id="{A0E02682-25EC-4E7B-8FD0-148BE3EB3DD7}"/>
               </a:ext>
             </a:extLst>
           </p:cNvPr>
@@ -5457,7 +5433,7 @@
           <p:nvPr/>
         </p:nvPicPr>
         <p:blipFill>
-          <a:blip r:embed="rId3">
+          <a:blip r:embed="rId2">
             <a:extLst>
               <a:ext uri="{28A0092B-C50C-407E-A947-70E740481C1C}">
                 <a14:useLocalDpi xmlns:a14="http://schemas.microsoft.com/office/drawing/2010/main" val="0"/>
@@ -5471,8 +5447,8 @@
         </p:blipFill>
         <p:spPr bwMode="auto">
           <a:xfrm>
-            <a:off x="1211123" y="1846878"/>
-            <a:ext cx="6856991" cy="3857057"/>
+            <a:off x="1231312" y="1824037"/>
+            <a:ext cx="7185236" cy="3783476"/>
           </a:xfrm>
           <a:prstGeom prst="rect">
             <a:avLst/>
@@ -5480,9 +5456,8 @@
           <a:noFill/>
           <a:ln>
             <a:solidFill>
-              <a:schemeClr val="tx1">
-                <a:lumMod val="40000"/>
-                <a:lumOff val="60000"/>
+              <a:schemeClr val="bg1">
+                <a:lumMod val="75000"/>
               </a:schemeClr>
             </a:solidFill>
           </a:ln>
@@ -7631,12 +7606,47 @@
           </a:p>
         </p:txBody>
       </p:sp>
+      <p:sp>
+        <p:nvSpPr>
+          <p:cNvPr id="9" name="TextBox 8">
+            <a:extLst>
+              <a:ext uri="{FF2B5EF4-FFF2-40B4-BE49-F238E27FC236}">
+                <a16:creationId xmlns:a16="http://schemas.microsoft.com/office/drawing/2014/main" id="{202FB94F-BE2E-434A-9DF7-94C2A77A1D8D}"/>
+              </a:ext>
+            </a:extLst>
+          </p:cNvPr>
+          <p:cNvSpPr txBox="1"/>
+          <p:nvPr/>
+        </p:nvSpPr>
+        <p:spPr>
+          <a:xfrm>
+            <a:off x="6970816" y="5867884"/>
+            <a:ext cx="3977035" cy="276999"/>
+          </a:xfrm>
+          <a:prstGeom prst="rect">
+            <a:avLst/>
+          </a:prstGeom>
+          <a:noFill/>
+        </p:spPr>
+        <p:txBody>
+          <a:bodyPr wrap="square">
+            <a:spAutoFit/>
+          </a:bodyPr>
+          <a:lstStyle/>
+          <a:p>
+            <a:r>
+              <a:rPr lang="en-US" sz="1200" dirty="0"/>
+              <a:t>US Census</a:t>
+            </a:r>
+          </a:p>
+        </p:txBody>
+      </p:sp>
       <p:pic>
         <p:nvPicPr>
-          <p:cNvPr id="1026" name="Picture 2" descr="Unveiling Geographic Patterns: A Comprehensive Guide To Choropleth Maps ...">
+          <p:cNvPr id="2052" name="Picture 4" descr="What Is The Difference Between A Thematic Map And A Choropleth Map at ...">
             <a:extLst>
               <a:ext uri="{FF2B5EF4-FFF2-40B4-BE49-F238E27FC236}">
-                <a16:creationId xmlns:a16="http://schemas.microsoft.com/office/drawing/2014/main" id="{245FFC63-ED21-4B37-90D3-12E57F8D80BE}"/>
+                <a16:creationId xmlns:a16="http://schemas.microsoft.com/office/drawing/2014/main" id="{4D999C4C-C601-4D7A-B31B-B9D80D0097DA}"/>
               </a:ext>
             </a:extLst>
           </p:cNvPr>
@@ -7660,28 +7670,13 @@
         </p:blipFill>
         <p:spPr bwMode="auto">
           <a:xfrm>
-            <a:off x="824007" y="1846966"/>
-            <a:ext cx="7396964" cy="3930104"/>
+            <a:off x="1244149" y="2003377"/>
+            <a:ext cx="5655479" cy="4246032"/>
           </a:xfrm>
           <a:prstGeom prst="rect">
             <a:avLst/>
           </a:prstGeom>
           <a:noFill/>
-          <a:ln>
-            <a:solidFill>
-              <a:schemeClr val="tx1">
-                <a:lumMod val="40000"/>
-                <a:lumOff val="60000"/>
-              </a:schemeClr>
-            </a:solidFill>
-          </a:ln>
-          <a:effectLst>
-            <a:outerShdw blurRad="50800" dist="38100" dir="2700000" algn="tl" rotWithShape="0">
-              <a:prstClr val="black">
-                <a:alpha val="40000"/>
-              </a:prstClr>
-            </a:outerShdw>
-          </a:effectLst>
           <a:extLst>
             <a:ext uri="{909E8E84-426E-40DD-AFC4-6F175D3DCCD1}">
               <a14:hiddenFill xmlns:a14="http://schemas.microsoft.com/office/drawing/2010/main">
@@ -7693,41 +7688,6 @@
           </a:extLst>
         </p:spPr>
       </p:pic>
-      <p:sp>
-        <p:nvSpPr>
-          <p:cNvPr id="9" name="TextBox 8">
-            <a:extLst>
-              <a:ext uri="{FF2B5EF4-FFF2-40B4-BE49-F238E27FC236}">
-                <a16:creationId xmlns:a16="http://schemas.microsoft.com/office/drawing/2014/main" id="{202FB94F-BE2E-434A-9DF7-94C2A77A1D8D}"/>
-              </a:ext>
-            </a:extLst>
-          </p:cNvPr>
-          <p:cNvSpPr txBox="1"/>
-          <p:nvPr/>
-        </p:nvSpPr>
-        <p:spPr>
-          <a:xfrm>
-            <a:off x="5584804" y="5918258"/>
-            <a:ext cx="3977035" cy="276999"/>
-          </a:xfrm>
-          <a:prstGeom prst="rect">
-            <a:avLst/>
-          </a:prstGeom>
-          <a:noFill/>
-        </p:spPr>
-        <p:txBody>
-          <a:bodyPr wrap="square">
-            <a:spAutoFit/>
-          </a:bodyPr>
-          <a:lstStyle/>
-          <a:p>
-            <a:r>
-              <a:rPr lang="en-US" sz="1200" dirty="0"/>
-              <a:t>https://seasineuropemap.github.io</a:t>
-            </a:r>
-          </a:p>
-        </p:txBody>
-      </p:sp>
     </p:spTree>
     <p:extLst>
       <p:ext uri="{BB962C8B-B14F-4D97-AF65-F5344CB8AC3E}">
